--- a/classes/parte-0-fundamentos-y-prerrequisitos/005-linux-esencial-para-seguridad-filesystem-permisos-y-usuarios/clase-005-presentacion.pptx
+++ b/classes/parte-0-fundamentos-y-prerrequisitos/005-linux-esencial-para-seguridad-filesystem-permisos-y-usuarios/clase-005-presentacion.pptx
@@ -17,6 +17,9 @@
     <p:sldId id="265" r:id="rId16"/>
     <p:sldId id="266" r:id="rId17"/>
     <p:sldId id="267" r:id="rId18"/>
+    <p:sldId id="268" r:id="rId19"/>
+    <p:sldId id="269" r:id="rId20"/>
+    <p:sldId id="270" r:id="rId21"/>
   </p:sldIdLst>
   <p:sldSz cx="9144000" cy="6858000" type="screen4x3"/>
   <p:notesSz cx="6858000" cy="9144000"/>
@@ -3198,7 +3201,7 @@
                   <a:srgbClr val="0B3D2E"/>
                 </a:solidFill>
               </a:rPr>
-              <a:t>⚠️ Errores comunes</a:t>
+              <a:t>✍️ Ejercicios</a:t>
             </a:r>
           </a:p>
         </p:txBody>
@@ -3236,67 +3239,97 @@
                   <a:srgbClr val="22282E"/>
                 </a:solidFill>
               </a:rPr>
-              <a:t>•  Permission denied al entrar a un directorio — Falta el bit x en el directorio. Añádelo con chmod +x.</a:t>
-            </a:r>
-          </a:p>
-          <a:p>
-            <a:pPr>
-              <a:spcAft>
-                <a:spcPts val="600"/>
-              </a:spcAft>
-            </a:pPr>
-            <a:r>
-              <a:rPr sz="1500">
-                <a:solidFill>
-                  <a:srgbClr val="22282E"/>
-                </a:solidFill>
-              </a:rPr>
-              <a:t>•  chmod 777 "para que funcione" — Antipatrón peligroso: da control total a todos. Usa el mínimo necesario.</a:t>
-            </a:r>
-          </a:p>
-          <a:p>
-            <a:pPr>
-              <a:spcAft>
-                <a:spcPts val="600"/>
-              </a:spcAft>
-            </a:pPr>
-            <a:r>
-              <a:rPr sz="1500">
-                <a:solidFill>
-                  <a:srgbClr val="22282E"/>
-                </a:solidFill>
-              </a:rPr>
-              <a:t>•  No poder leer /etc/shadow como usuario — Es correcto: solo root/grupo shadow. Usa sudo si tienes permiso.</a:t>
-            </a:r>
-          </a:p>
-          <a:p>
-            <a:pPr>
-              <a:spcAft>
-                <a:spcPts val="600"/>
-              </a:spcAft>
-            </a:pPr>
-            <a:r>
-              <a:rPr sz="1500">
-                <a:solidFill>
-                  <a:srgbClr val="22282E"/>
-                </a:solidFill>
-              </a:rPr>
-              <a:t>•  SUID root en un script propio no eleva — El kernel ignora SUID en scripts por seguridad; solo aplica a binarios.</a:t>
-            </a:r>
-          </a:p>
-          <a:p>
-            <a:pPr>
-              <a:spcAft>
-                <a:spcPts val="600"/>
-              </a:spcAft>
-            </a:pPr>
-            <a:r>
-              <a:rPr sz="1500">
-                <a:solidFill>
-                  <a:srgbClr val="22282E"/>
-                </a:solidFill>
-              </a:rPr>
-              <a:t>•  Permisos correctos pero acceso denegado — Puede haber una ACL o SELinux/AppArmor. Revisa getfacl y el LSM.</a:t>
+              <a:t>•  Traduce a octal: rwxr-x---, rw-rw-r--, r--------, y de vuelta 700, 664, 600 a símbolos.</a:t>
+            </a:r>
+          </a:p>
+          <a:p>
+            <a:pPr>
+              <a:spcAft>
+                <a:spcPts val="600"/>
+              </a:spcAft>
+            </a:pPr>
+            <a:r>
+              <a:rPr sz="1500">
+                <a:solidFill>
+                  <a:srgbClr val="22282E"/>
+                </a:solidFill>
+              </a:rPr>
+              <a:t>•  Explica con un ejemplo qué significa el permiso x en un directorio frente a en un archivo.</a:t>
+            </a:r>
+          </a:p>
+          <a:p>
+            <a:pPr>
+              <a:spcAft>
+                <a:spcPts val="600"/>
+              </a:spcAft>
+            </a:pPr>
+            <a:r>
+              <a:rPr sz="1500">
+                <a:solidFill>
+                  <a:srgbClr val="22282E"/>
+                </a:solidFill>
+              </a:rPr>
+              <a:t>•  Crea un directorio compartido por un grupo donde los archivos nuevos hereden ese grupo automáticamente (pista: SGID).</a:t>
+            </a:r>
+          </a:p>
+          <a:p>
+            <a:pPr>
+              <a:spcAft>
+                <a:spcPts val="600"/>
+              </a:spcAft>
+            </a:pPr>
+            <a:r>
+              <a:rPr sz="1500">
+                <a:solidFill>
+                  <a:srgbClr val="22282E"/>
+                </a:solidFill>
+              </a:rPr>
+              <a:t>•  Configura un directorio temporal donde cada usuario solo pueda borrar sus propios archivos (sticky bit) y verifícalo con dos cuentas.</a:t>
+            </a:r>
+          </a:p>
+          <a:p>
+            <a:pPr>
+              <a:spcAft>
+                <a:spcPts val="600"/>
+              </a:spcAft>
+            </a:pPr>
+            <a:r>
+              <a:rPr sz="1500">
+                <a:solidFill>
+                  <a:srgbClr val="22282E"/>
+                </a:solidFill>
+              </a:rPr>
+              <a:t>•  Investiga por qué /etc/shadow tiene permisos 640 root:shadow y qué riesgo concreto introduciría dejarlo en 644.</a:t>
+            </a:r>
+          </a:p>
+          <a:p>
+            <a:pPr>
+              <a:spcAft>
+                <a:spcPts val="600"/>
+              </a:spcAft>
+            </a:pPr>
+            <a:r>
+              <a:rPr sz="1500">
+                <a:solidFill>
+                  <a:srgbClr val="22282E"/>
+                </a:solidFill>
+              </a:rPr>
+              <a:t>•  Con find, localiza archivos con escritura para "otros" bajo /etc y explica por qué cada hallazgo sería un problema.</a:t>
+            </a:r>
+          </a:p>
+          <a:p>
+            <a:pPr>
+              <a:spcAft>
+                <a:spcPts val="600"/>
+              </a:spcAft>
+            </a:pPr>
+            <a:r>
+              <a:rPr sz="1500">
+                <a:solidFill>
+                  <a:srgbClr val="22282E"/>
+                </a:solidFill>
+              </a:rPr>
+              <a:t>•  Explica por qué el kernel ignora el bit SUID en scripts pero lo respeta en binarios compilados, y qué implica eso para la escalada.</a:t>
             </a:r>
           </a:p>
         </p:txBody>
@@ -3347,7 +3380,7 @@
                   <a:srgbClr val="0B3D2E"/>
                 </a:solidFill>
               </a:rPr>
-              <a:t>❓ Preguntas frecuentes</a:t>
+              <a:t>📝 Reto verificable</a:t>
             </a:r>
           </a:p>
         </p:txBody>
@@ -3385,52 +3418,22 @@
                   <a:srgbClr val="22282E"/>
                 </a:solidFill>
               </a:rPr>
-              <a:t>•  ❓ ¿Octal o simbólico? Ambos. Octal es compacto para asignar permisos completos; simbólico es cómodo para añadir/quitar un bit sin tocar el resto.</a:t>
-            </a:r>
-          </a:p>
-          <a:p>
-            <a:pPr>
-              <a:spcAft>
-                <a:spcPts val="600"/>
-              </a:spcAft>
-            </a:pPr>
-            <a:r>
-              <a:rPr sz="1500">
-                <a:solidFill>
-                  <a:srgbClr val="22282E"/>
-                </a:solidFill>
-              </a:rPr>
-              <a:t>•  ❓ ¿Por qué los binarios SUID son peligrosos? Porque ejecutan con privilegios del propietario. Si un SUID root tiene un fallo o permite ejecutar comandos, un usuario normal puede volverse root. GTFOBins cataloga muchos casos.</a:t>
-            </a:r>
-          </a:p>
-          <a:p>
-            <a:pPr>
-              <a:spcAft>
-                <a:spcPts val="600"/>
-              </a:spcAft>
-            </a:pPr>
-            <a:r>
-              <a:rPr sz="1500">
-                <a:solidFill>
-                  <a:srgbClr val="22282E"/>
-                </a:solidFill>
-              </a:rPr>
-              <a:t>•  ❓ ¿root puede saltarse los permisos? Sí, root ignora los permisos rwx tradicionales. Por eso limitar el uso de root y las escaladas es central en seguridad.</a:t>
-            </a:r>
-          </a:p>
-          <a:p>
-            <a:pPr>
-              <a:spcAft>
-                <a:spcPts val="600"/>
-              </a:spcAft>
-            </a:pPr>
-            <a:r>
-              <a:rPr sz="1500">
-                <a:solidFill>
-                  <a:srgbClr val="22282E"/>
-                </a:solidFill>
-              </a:rPr>
-              <a:t>•  ❓ ¿Las ACLs sustituyen a rwx? No, las complementan. rwx sigue siendo la base; las ACLs añaden entradas por usuario/grupo cuando rwx no basta.</a:t>
+              <a:t>•  Configura una carpeta de proyecto compartida por un grupo equipo con estas propiedades: los miembros pueden crear y editar archivos, los archivos nuevos pertenecen automáticamente al grupo equipo, y…</a:t>
+            </a:r>
+          </a:p>
+          <a:p>
+            <a:pPr>
+              <a:spcAft>
+                <a:spcPts val="600"/>
+              </a:spcAft>
+            </a:pPr>
+            <a:r>
+              <a:rPr sz="1500">
+                <a:solidFill>
+                  <a:srgbClr val="22282E"/>
+                </a:solidFill>
+              </a:rPr>
+              <a:t>•  Criterio de aceptación: ls -ld de la carpeta muestra los bits SGID y sticky activos; un segundo usuario del grupo puede crear un archivo que queda con grupo equipo, pero no puede borrar el archivo…</a:t>
             </a:r>
           </a:p>
         </p:txBody>
@@ -3481,7 +3484,7 @@
                   <a:srgbClr val="0B3D2E"/>
                 </a:solidFill>
               </a:rPr>
-              <a:t>🔗 Referencias</a:t>
+              <a:t>⚠️ Errores comunes</a:t>
             </a:r>
           </a:p>
         </p:txBody>
@@ -3519,7 +3522,320 @@
                   <a:srgbClr val="22282E"/>
                 </a:solidFill>
               </a:rPr>
-              <a:t>•  Michael Kerrisk, The Linux Programming Interface (caps. de archivos y permisos).</a:t>
+              <a:t>•  Permission denied al entrar a un directorio — Falta el bit x en el directorio. Añádelo con chmod +x sobre el directorio (no sobre los archivos).</a:t>
+            </a:r>
+          </a:p>
+          <a:p>
+            <a:pPr>
+              <a:spcAft>
+                <a:spcPts val="600"/>
+              </a:spcAft>
+            </a:pPr>
+            <a:r>
+              <a:rPr sz="1500">
+                <a:solidFill>
+                  <a:srgbClr val="22282E"/>
+                </a:solidFill>
+              </a:rPr>
+              <a:t>•  chmod 777 "para que funcione" — Antipatrón peligroso: da control total a todos y elimina toda garantía. Usa el mínimo privilegio y grupos.</a:t>
+            </a:r>
+          </a:p>
+          <a:p>
+            <a:pPr>
+              <a:spcAft>
+                <a:spcPts val="600"/>
+              </a:spcAft>
+            </a:pPr>
+            <a:r>
+              <a:rPr sz="1500">
+                <a:solidFill>
+                  <a:srgbClr val="22282E"/>
+                </a:solidFill>
+              </a:rPr>
+              <a:t>•  No poder leer /etc/shadow como usuario normal — Es el comportamiento correcto: solo root o el grupo shadow. Usa sudo si tienes permiso legítimo.</a:t>
+            </a:r>
+          </a:p>
+          <a:p>
+            <a:pPr>
+              <a:spcAft>
+                <a:spcPts val="600"/>
+              </a:spcAft>
+            </a:pPr>
+            <a:r>
+              <a:rPr sz="1500">
+                <a:solidFill>
+                  <a:srgbClr val="22282E"/>
+                </a:solidFill>
+              </a:rPr>
+              <a:t>•  Un SUID root en un script propio no eleva privilegios — El kernel ignora SUID en scripts por seguridad; solo aplica a binarios compilados.</a:t>
+            </a:r>
+          </a:p>
+          <a:p>
+            <a:pPr>
+              <a:spcAft>
+                <a:spcPts val="600"/>
+              </a:spcAft>
+            </a:pPr>
+            <a:r>
+              <a:rPr sz="1500">
+                <a:solidFill>
+                  <a:srgbClr val="22282E"/>
+                </a:solidFill>
+              </a:rPr>
+              <a:t>•  Permisos rwx correctos pero acceso denegado — Puede haber una ACL restrictiva o un LSM (SELinux/AppArmor). Revisa getfacl y el módulo de seguridad.</a:t>
+            </a:r>
+          </a:p>
+          <a:p>
+            <a:pPr>
+              <a:spcAft>
+                <a:spcPts val="600"/>
+              </a:spcAft>
+            </a:pPr>
+            <a:r>
+              <a:rPr sz="1500">
+                <a:solidFill>
+                  <a:srgbClr val="22282E"/>
+                </a:solidFill>
+              </a:rPr>
+              <a:t>•  El archivo nuevo no hereda el grupo esperado — Falta el bit SGID en el directorio contenedor. Aplícalo con chmod g+s sobre la carpeta.</a:t>
+            </a:r>
+          </a:p>
+        </p:txBody>
+      </p:sp>
+    </p:spTree>
+  </p:cSld>
+  <p:clrMapOvr>
+    <a:masterClrMapping/>
+  </p:clrMapOvr>
+</p:sld>
+</file>
+
+<file path=ppt/slides/slide13.xml><?xml version="1.0" encoding="utf-8"?>
+<p:sld xmlns:a="http://schemas.openxmlformats.org/drawingml/2006/main" xmlns:p="http://schemas.openxmlformats.org/presentationml/2006/main" xmlns:r="http://schemas.openxmlformats.org/officeDocument/2006/relationships">
+  <p:cSld>
+    <p:spTree>
+      <p:nvGrpSpPr>
+        <p:cNvPr id="1" name=""/>
+        <p:cNvGrpSpPr/>
+        <p:nvPr/>
+      </p:nvGrpSpPr>
+      <p:grpSpPr/>
+      <p:sp>
+        <p:nvSpPr>
+          <p:cNvPr id="2" name="TextBox 1"/>
+          <p:cNvSpPr txBox="1"/>
+          <p:nvPr/>
+        </p:nvSpPr>
+        <p:spPr>
+          <a:xfrm>
+            <a:off x="457200" y="320040"/>
+            <a:ext cx="8229600" cy="822960"/>
+          </a:xfrm>
+          <a:prstGeom prst="rect">
+            <a:avLst/>
+          </a:prstGeom>
+          <a:noFill/>
+        </p:spPr>
+        <p:txBody>
+          <a:bodyPr wrap="square">
+            <a:spAutoFit/>
+          </a:bodyPr>
+          <a:lstStyle/>
+          <a:p>
+            <a:r>
+              <a:rPr sz="2600" b="1">
+                <a:solidFill>
+                  <a:srgbClr val="0B3D2E"/>
+                </a:solidFill>
+              </a:rPr>
+              <a:t>❓ Preguntas frecuentes</a:t>
+            </a:r>
+          </a:p>
+        </p:txBody>
+      </p:sp>
+      <p:sp>
+        <p:nvSpPr>
+          <p:cNvPr id="3" name="TextBox 2"/>
+          <p:cNvSpPr txBox="1"/>
+          <p:nvPr/>
+        </p:nvSpPr>
+        <p:spPr>
+          <a:xfrm>
+            <a:off x="457200" y="1280160"/>
+            <a:ext cx="8229600" cy="4937760"/>
+          </a:xfrm>
+          <a:prstGeom prst="rect">
+            <a:avLst/>
+          </a:prstGeom>
+          <a:noFill/>
+        </p:spPr>
+        <p:txBody>
+          <a:bodyPr wrap="square">
+            <a:spAutoFit/>
+          </a:bodyPr>
+          <a:lstStyle/>
+          <a:p>
+            <a:pPr>
+              <a:spcAft>
+                <a:spcPts val="600"/>
+              </a:spcAft>
+            </a:pPr>
+            <a:r>
+              <a:rPr sz="1500">
+                <a:solidFill>
+                  <a:srgbClr val="22282E"/>
+                </a:solidFill>
+              </a:rPr>
+              <a:t>•  ❓ ¿Octal o simbólico? Ambos. La octal es compacta para asignar un conjunto completo de permisos de una vez y para auditar de un vistazo; la simbólica es cómoda para añadir o quitar un solo bit sin…</a:t>
+            </a:r>
+          </a:p>
+          <a:p>
+            <a:pPr>
+              <a:spcAft>
+                <a:spcPts val="600"/>
+              </a:spcAft>
+            </a:pPr>
+            <a:r>
+              <a:rPr sz="1500">
+                <a:solidFill>
+                  <a:srgbClr val="22282E"/>
+                </a:solidFill>
+              </a:rPr>
+              <a:t>•  ❓ ¿Por qué los binarios SUID son peligrosos? Porque ejecutan con los privilegios de su propietario, a menudo root. Si un SUID root tiene un fallo o permite ejecutar comandos arbitrarios, un usuario…</a:t>
+            </a:r>
+          </a:p>
+          <a:p>
+            <a:pPr>
+              <a:spcAft>
+                <a:spcPts val="600"/>
+              </a:spcAft>
+            </a:pPr>
+            <a:r>
+              <a:rPr sz="1500">
+                <a:solidFill>
+                  <a:srgbClr val="22282E"/>
+                </a:solidFill>
+              </a:rPr>
+              <a:t>•  ❓ ¿root puede saltarse los permisos? Sí, root ignora los permisos rwx tradicionales. Por eso limitar el uso de root y controlar las vías de escalada de privilegios es central en la seguridad de Linux.</a:t>
+            </a:r>
+          </a:p>
+          <a:p>
+            <a:pPr>
+              <a:spcAft>
+                <a:spcPts val="600"/>
+              </a:spcAft>
+            </a:pPr>
+            <a:r>
+              <a:rPr sz="1500">
+                <a:solidFill>
+                  <a:srgbClr val="22282E"/>
+                </a:solidFill>
+              </a:rPr>
+              <a:t>•  ❓ ¿Las ACLs sustituyen a rwx? No, lo complementan. rwx sigue siendo la base; las ACLs añaden entradas por usuario o grupo específico cuando el modelo de tres categorías se queda corto.</a:t>
+            </a:r>
+          </a:p>
+          <a:p>
+            <a:pPr>
+              <a:spcAft>
+                <a:spcPts val="600"/>
+              </a:spcAft>
+            </a:pPr>
+            <a:r>
+              <a:rPr sz="1500">
+                <a:solidFill>
+                  <a:srgbClr val="22282E"/>
+                </a:solidFill>
+              </a:rPr>
+              <a:t>•  ❓ ¿Dónde miro primero tras un posible compromiso? En /var/log (especialmente auth.log), en las cuentas de /etc/passwd con UID 0 inesperados, en tareas programadas de /etc/cron y en binarios SUID…</a:t>
+            </a:r>
+          </a:p>
+        </p:txBody>
+      </p:sp>
+    </p:spTree>
+  </p:cSld>
+  <p:clrMapOvr>
+    <a:masterClrMapping/>
+  </p:clrMapOvr>
+</p:sld>
+</file>
+
+<file path=ppt/slides/slide14.xml><?xml version="1.0" encoding="utf-8"?>
+<p:sld xmlns:a="http://schemas.openxmlformats.org/drawingml/2006/main" xmlns:p="http://schemas.openxmlformats.org/presentationml/2006/main" xmlns:r="http://schemas.openxmlformats.org/officeDocument/2006/relationships">
+  <p:cSld>
+    <p:spTree>
+      <p:nvGrpSpPr>
+        <p:cNvPr id="1" name=""/>
+        <p:cNvGrpSpPr/>
+        <p:nvPr/>
+      </p:nvGrpSpPr>
+      <p:grpSpPr/>
+      <p:sp>
+        <p:nvSpPr>
+          <p:cNvPr id="2" name="TextBox 1"/>
+          <p:cNvSpPr txBox="1"/>
+          <p:nvPr/>
+        </p:nvSpPr>
+        <p:spPr>
+          <a:xfrm>
+            <a:off x="457200" y="320040"/>
+            <a:ext cx="8229600" cy="822960"/>
+          </a:xfrm>
+          <a:prstGeom prst="rect">
+            <a:avLst/>
+          </a:prstGeom>
+          <a:noFill/>
+        </p:spPr>
+        <p:txBody>
+          <a:bodyPr wrap="square">
+            <a:spAutoFit/>
+          </a:bodyPr>
+          <a:lstStyle/>
+          <a:p>
+            <a:r>
+              <a:rPr sz="2600" b="1">
+                <a:solidFill>
+                  <a:srgbClr val="0B3D2E"/>
+                </a:solidFill>
+              </a:rPr>
+              <a:t>🔗 Referencias</a:t>
+            </a:r>
+          </a:p>
+        </p:txBody>
+      </p:sp>
+      <p:sp>
+        <p:nvSpPr>
+          <p:cNvPr id="3" name="TextBox 2"/>
+          <p:cNvSpPr txBox="1"/>
+          <p:nvPr/>
+        </p:nvSpPr>
+        <p:spPr>
+          <a:xfrm>
+            <a:off x="457200" y="1280160"/>
+            <a:ext cx="8229600" cy="4937760"/>
+          </a:xfrm>
+          <a:prstGeom prst="rect">
+            <a:avLst/>
+          </a:prstGeom>
+          <a:noFill/>
+        </p:spPr>
+        <p:txBody>
+          <a:bodyPr wrap="square">
+            <a:spAutoFit/>
+          </a:bodyPr>
+          <a:lstStyle/>
+          <a:p>
+            <a:pPr>
+              <a:spcAft>
+                <a:spcPts val="600"/>
+              </a:spcAft>
+            </a:pPr>
+            <a:r>
+              <a:rPr sz="1500">
+                <a:solidFill>
+                  <a:srgbClr val="22282E"/>
+                </a:solidFill>
+              </a:rPr>
+              <a:t>•  Michael Kerrisk, The Linux Programming Interface (capítulos de archivos y permisos).</a:t>
             </a:r>
           </a:p>
           <a:p>
@@ -3569,6 +3885,81 @@
           </a:p>
         </p:txBody>
       </p:sp>
+    </p:spTree>
+  </p:cSld>
+  <p:clrMapOvr>
+    <a:masterClrMapping/>
+  </p:clrMapOvr>
+</p:sld>
+</file>
+
+<file path=ppt/slides/slide15.xml><?xml version="1.0" encoding="utf-8"?>
+<p:sld xmlns:a="http://schemas.openxmlformats.org/drawingml/2006/main" xmlns:p="http://schemas.openxmlformats.org/presentationml/2006/main" xmlns:r="http://schemas.openxmlformats.org/officeDocument/2006/relationships">
+  <p:cSld>
+    <p:spTree>
+      <p:nvGrpSpPr>
+        <p:cNvPr id="1" name=""/>
+        <p:cNvGrpSpPr/>
+        <p:nvPr/>
+      </p:nvGrpSpPr>
+      <p:grpSpPr/>
+      <p:sp>
+        <p:nvSpPr>
+          <p:cNvPr id="2" name="TextBox 1"/>
+          <p:cNvSpPr txBox="1"/>
+          <p:nvPr/>
+        </p:nvSpPr>
+        <p:spPr>
+          <a:xfrm>
+            <a:off x="457200" y="274320"/>
+            <a:ext cx="8229600" cy="640080"/>
+          </a:xfrm>
+          <a:prstGeom prst="rect">
+            <a:avLst/>
+          </a:prstGeom>
+          <a:noFill/>
+        </p:spPr>
+        <p:txBody>
+          <a:bodyPr wrap="square">
+            <a:spAutoFit/>
+          </a:bodyPr>
+          <a:lstStyle/>
+          <a:p>
+            <a:r>
+              <a:rPr sz="2200" b="1">
+                <a:solidFill>
+                  <a:srgbClr val="0B3D2E"/>
+                </a:solidFill>
+              </a:rPr>
+              <a:t>Diagrama de la clase</a:t>
+            </a:r>
+          </a:p>
+        </p:txBody>
+      </p:sp>
+      <p:pic>
+        <p:nvPicPr>
+          <p:cNvPr id="3" name="Picture 2" descr="1311fb81f552da7a.png"/>
+          <p:cNvPicPr>
+            <a:picLocks noChangeAspect="1"/>
+          </p:cNvPicPr>
+          <p:nvPr/>
+        </p:nvPicPr>
+        <p:blipFill>
+          <a:blip r:embed="rId2"/>
+          <a:stretch>
+            <a:fillRect/>
+          </a:stretch>
+        </p:blipFill>
+        <p:spPr>
+          <a:xfrm>
+            <a:off x="457200" y="3474720"/>
+            <a:ext cx="8229600" cy="548640"/>
+          </a:xfrm>
+          <a:prstGeom prst="rect">
+            <a:avLst/>
+          </a:prstGeom>
+        </p:spPr>
+      </p:pic>
     </p:spTree>
   </p:cSld>
   <p:clrMapOvr>
@@ -3653,7 +4044,7 @@
                   <a:srgbClr val="22282E"/>
                 </a:solidFill>
               </a:rPr>
-              <a:t>•  Dominar el modelo de archivos, permisos y usuarios de Linux, que es la base de la mayoría de escaladas de privilegios y de las medidas de hardening. Al terminar sabrás leer y modificar permisos, entender usuarios y grupos, y reconocer configuraciones peligrosas como binarios SUID.</a:t>
+              <a:t>•  Dominar el modelo de archivos, permisos y usuarios de Linux, que es la base sobre la que ocurren la mayoría de las escaladas de privilegios y de las medidas de hardening. Casi todo en Linux es un…</a:t>
             </a:r>
           </a:p>
         </p:txBody>
@@ -3820,6 +4211,21 @@
               <a:t>•  Aplicar el principio de mínimo privilegio en el filesystem.</a:t>
             </a:r>
           </a:p>
+          <a:p>
+            <a:pPr>
+              <a:spcAft>
+                <a:spcPts val="600"/>
+              </a:spcAft>
+            </a:pPr>
+            <a:r>
+              <a:rPr sz="1500">
+                <a:solidFill>
+                  <a:srgbClr val="22282E"/>
+                </a:solidFill>
+              </a:rPr>
+              <a:t>•  Reconocer vectores de escalada de privilegios basados en permisos mal configurados.</a:t>
+            </a:r>
+          </a:p>
         </p:txBody>
       </p:sp>
     </p:spTree>
@@ -4047,7 +4453,7 @@
                   <a:srgbClr val="0B3D2E"/>
                 </a:solidFill>
               </a:rPr>
-              <a:t>📖 Definiciones y características</a:t>
+              <a:t>🧠 Explicación en profundidad</a:t>
             </a:r>
           </a:p>
         </p:txBody>
@@ -4085,82 +4491,97 @@
                   <a:srgbClr val="22282E"/>
                 </a:solidFill>
               </a:rPr>
-              <a:t>•  FHS (Filesystem Hierarchy Standard): convención de directorios (/etc, /bin, /var, /home...). Clave: /etc guarda configuración, /var/log los logs.</a:t>
-            </a:r>
-          </a:p>
-          <a:p>
-            <a:pPr>
-              <a:spcAft>
-                <a:spcPts val="600"/>
-              </a:spcAft>
-            </a:pPr>
-            <a:r>
-              <a:rPr sz="1500">
-                <a:solidFill>
-                  <a:srgbClr val="22282E"/>
-                </a:solidFill>
-              </a:rPr>
-              <a:t>•  Permisos rwx: lectura, escritura y ejecución para propietario, grupo y otros. Clave: en un directorio, x significa "poder entrar".</a:t>
-            </a:r>
-          </a:p>
-          <a:p>
-            <a:pPr>
-              <a:spcAft>
-                <a:spcPts val="600"/>
-              </a:spcAft>
-            </a:pPr>
-            <a:r>
-              <a:rPr sz="1500">
-                <a:solidFill>
-                  <a:srgbClr val="22282E"/>
-                </a:solidFill>
-              </a:rPr>
-              <a:t>•  /etc/shadow: almacena los hashes de las contraseñas, legible solo por root. Clave: objetivo de cracking offline.</a:t>
-            </a:r>
-          </a:p>
-          <a:p>
-            <a:pPr>
-              <a:spcAft>
-                <a:spcPts val="600"/>
-              </a:spcAft>
-            </a:pPr>
-            <a:r>
-              <a:rPr sz="1500">
-                <a:solidFill>
-                  <a:srgbClr val="22282E"/>
-                </a:solidFill>
-              </a:rPr>
-              <a:t>•  SUID: bit que hace que un ejecutable corra con los privilegios del propietario (a menudo root). Clave: un SUID mal puesto = escalada a root.</a:t>
-            </a:r>
-          </a:p>
-          <a:p>
-            <a:pPr>
-              <a:spcAft>
-                <a:spcPts val="600"/>
-              </a:spcAft>
-            </a:pPr>
-            <a:r>
-              <a:rPr sz="1500">
-                <a:solidFill>
-                  <a:srgbClr val="22282E"/>
-                </a:solidFill>
-              </a:rPr>
-              <a:t>•  umask: máscara que resta permisos a los archivos recién creados. Clave: define la exposición por defecto.</a:t>
-            </a:r>
-          </a:p>
-          <a:p>
-            <a:pPr>
-              <a:spcAft>
-                <a:spcPts val="600"/>
-              </a:spcAft>
-            </a:pPr>
-            <a:r>
-              <a:rPr sz="1500">
-                <a:solidFill>
-                  <a:srgbClr val="22282E"/>
-                </a:solidFill>
-              </a:rPr>
-              <a:t>•  ACL (Access Control List): permisos por usuario/grupo adicionales a rwx. Clave: getfacl/setfacl para control granular.</a:t>
+              <a:t>•  El Filesystem Hierarchy Standard (FHS) es la convención que define para qué sirve cada directorio de nivel superior en Linux, y conocerlo convierte un sistema desconocido en territorio familiar. La…</a:t>
+            </a:r>
+          </a:p>
+          <a:p>
+            <a:pPr>
+              <a:spcAft>
+                <a:spcPts val="600"/>
+              </a:spcAft>
+            </a:pPr>
+            <a:r>
+              <a:rPr sz="1500">
+                <a:solidFill>
+                  <a:srgbClr val="22282E"/>
+                </a:solidFill>
+              </a:rPr>
+              <a:t>•  Cada usuario en Linux se identifica por un número, el UID, y pertenece a uno o varios grupos identificados por su GID. El usuario con UID 0 es root, el superusuario que ignora las comprobaciones de…</a:t>
+            </a:r>
+          </a:p>
+          <a:p>
+            <a:pPr>
+              <a:spcAft>
+                <a:spcPts val="600"/>
+              </a:spcAft>
+            </a:pPr>
+            <a:r>
+              <a:rPr sz="1500">
+                <a:solidFill>
+                  <a:srgbClr val="22282E"/>
+                </a:solidFill>
+              </a:rPr>
+              <a:t>•  El modelo de permisos clásico de Unix asigna a cada archivo tres permisos —r (lectura), w (escritura) y x (ejecución)— para tres categorías de sujetos: el propietario (user), el grupo propietario y…</a:t>
+            </a:r>
+          </a:p>
+          <a:p>
+            <a:pPr>
+              <a:spcAft>
+                <a:spcPts val="600"/>
+              </a:spcAft>
+            </a:pPr>
+            <a:r>
+              <a:rPr sz="1500">
+                <a:solidFill>
+                  <a:srgbClr val="22282E"/>
+                </a:solidFill>
+              </a:rPr>
+              <a:t>•  Bloque — En -rw-r--r--</a:t>
+            </a:r>
+          </a:p>
+          <a:p>
+            <a:pPr>
+              <a:spcAft>
+                <a:spcPts val="600"/>
+              </a:spcAft>
+            </a:pPr>
+            <a:r>
+              <a:rPr sz="1500">
+                <a:solidFill>
+                  <a:srgbClr val="22282E"/>
+                </a:solidFill>
+              </a:rPr>
+              <a:t>•  Tipo — -</a:t>
+            </a:r>
+          </a:p>
+          <a:p>
+            <a:pPr>
+              <a:spcAft>
+                <a:spcPts val="600"/>
+              </a:spcAft>
+            </a:pPr>
+            <a:r>
+              <a:rPr sz="1500">
+                <a:solidFill>
+                  <a:srgbClr val="22282E"/>
+                </a:solidFill>
+              </a:rPr>
+              <a:t>•  Propietario (user) — rw-</a:t>
+            </a:r>
+          </a:p>
+          <a:p>
+            <a:pPr>
+              <a:spcAft>
+                <a:spcPts val="600"/>
+              </a:spcAft>
+            </a:pPr>
+            <a:r>
+              <a:rPr sz="1500">
+                <a:solidFill>
+                  <a:srgbClr val="22282E"/>
+                </a:solidFill>
+              </a:rPr>
+              <a:t>•  Grupo — r--</a:t>
             </a:r>
           </a:p>
         </p:txBody>
@@ -4211,7 +4632,7 @@
                   <a:srgbClr val="0B3D2E"/>
                 </a:solidFill>
               </a:rPr>
-              <a:t>🧰 Herramientas y preparación</a:t>
+              <a:t>📖 Definiciones y características</a:t>
             </a:r>
           </a:p>
         </p:txBody>
@@ -4249,7 +4670,97 @@
                   <a:srgbClr val="22282E"/>
                 </a:solidFill>
               </a:rPr>
-              <a:t>•  Trabaja en tu VM Kali o cualquier Linux del laboratorio. Necesitas una terminal y una cuenta con sudo. Comandos base: ls -l, chmod, chown, id, stat, find, getfacl/setfacl. Ten a mano las páginas de manual (man chmod).</a:t>
+              <a:t>•  FHS (Filesystem Hierarchy Standard): convención que define el propósito de cada directorio (/etc configuración, /var/log logs, /home usuarios). Conocerla permite orientarse en cualquier sistema y…</a:t>
+            </a:r>
+          </a:p>
+          <a:p>
+            <a:pPr>
+              <a:spcAft>
+                <a:spcPts val="600"/>
+              </a:spcAft>
+            </a:pPr>
+            <a:r>
+              <a:rPr sz="1500">
+                <a:solidFill>
+                  <a:srgbClr val="22282E"/>
+                </a:solidFill>
+              </a:rPr>
+              <a:t>•  /etc/passwd: archivo legible por todos con los datos de cada cuenta (nombre, UID, GID, home, shell). Ya no guarda contraseñas; sirve para resolver identidades de usuario.</a:t>
+            </a:r>
+          </a:p>
+          <a:p>
+            <a:pPr>
+              <a:spcAft>
+                <a:spcPts val="600"/>
+              </a:spcAft>
+            </a:pPr>
+            <a:r>
+              <a:rPr sz="1500">
+                <a:solidFill>
+                  <a:srgbClr val="22282E"/>
+                </a:solidFill>
+              </a:rPr>
+              <a:t>•  /etc/shadow: archivo legible solo por root que almacena las contraseñas hasheadas y con sal. Es el objetivo de un atacante que quiera romper credenciales offline, de ahí sus permisos restrictivos.</a:t>
+            </a:r>
+          </a:p>
+          <a:p>
+            <a:pPr>
+              <a:spcAft>
+                <a:spcPts val="600"/>
+              </a:spcAft>
+            </a:pPr>
+            <a:r>
+              <a:rPr sz="1500">
+                <a:solidFill>
+                  <a:srgbClr val="22282E"/>
+                </a:solidFill>
+              </a:rPr>
+              <a:t>•  UID y GID: identificadores numéricos de usuario y grupo. El UID 0 es root, el superusuario que ignora las comprobaciones de permisos rwx tradicionales.</a:t>
+            </a:r>
+          </a:p>
+          <a:p>
+            <a:pPr>
+              <a:spcAft>
+                <a:spcPts val="600"/>
+              </a:spcAft>
+            </a:pPr>
+            <a:r>
+              <a:rPr sz="1500">
+                <a:solidFill>
+                  <a:srgbClr val="22282E"/>
+                </a:solidFill>
+              </a:rPr>
+              <a:t>•  Permisos rwx: lectura, escritura y ejecución para propietario, grupo y otros. Sobre un directorio cambian de sentido: x significa poder atravesarlo y w poder crear o borrar entradas dentro.</a:t>
+            </a:r>
+          </a:p>
+          <a:p>
+            <a:pPr>
+              <a:spcAft>
+                <a:spcPts val="600"/>
+              </a:spcAft>
+            </a:pPr>
+            <a:r>
+              <a:rPr sz="1500">
+                <a:solidFill>
+                  <a:srgbClr val="22282E"/>
+                </a:solidFill>
+              </a:rPr>
+              <a:t>•  Notación octal: forma compacta de expresar permisos sumando r=4, w=2, x=1 por categoría (por ejemplo, 750). Es la más usada en administración y auditoría por su concisión.</a:t>
+            </a:r>
+          </a:p>
+          <a:p>
+            <a:pPr>
+              <a:spcAft>
+                <a:spcPts val="600"/>
+              </a:spcAft>
+            </a:pPr>
+            <a:r>
+              <a:rPr sz="1500">
+                <a:solidFill>
+                  <a:srgbClr val="22282E"/>
+                </a:solidFill>
+              </a:rPr>
+              <a:t>•  umask: máscara que resta permisos a los archivos recién creados y define su exposición por defecto. Ajustarla es una medida de hardening de bajo coste.</a:t>
             </a:r>
           </a:p>
         </p:txBody>
@@ -4300,7 +4811,7 @@
                   <a:srgbClr val="0B3D2E"/>
                 </a:solidFill>
               </a:rPr>
-              <a:t>🧪 Laboratorio guiado</a:t>
+              <a:t>📔 Glosario</a:t>
             </a:r>
           </a:p>
         </p:txBody>
@@ -4338,97 +4849,97 @@
                   <a:srgbClr val="22282E"/>
                 </a:solidFill>
               </a:rPr>
-              <a:t>•  Explorar el FHS:</a:t>
-            </a:r>
-          </a:p>
-          <a:p>
-            <a:pPr>
-              <a:spcAft>
-                <a:spcPts val="600"/>
-              </a:spcAft>
-            </a:pPr>
-            <a:r>
-              <a:rPr sz="1500">
-                <a:solidFill>
-                  <a:srgbClr val="22282E"/>
-                </a:solidFill>
-              </a:rPr>
-              <a:t>•  ls -la / ; ls -l /etc/passwd /etc/shadow</a:t>
-            </a:r>
-          </a:p>
-          <a:p>
-            <a:pPr>
-              <a:spcAft>
-                <a:spcPts val="600"/>
-              </a:spcAft>
-            </a:pPr>
-            <a:r>
-              <a:rPr sz="1500">
-                <a:solidFill>
-                  <a:srgbClr val="22282E"/>
-                </a:solidFill>
-              </a:rPr>
-              <a:t>•  Observa que shadow no es legible por usuarios normales.</a:t>
-            </a:r>
-          </a:p>
-          <a:p>
-            <a:pPr>
-              <a:spcAft>
-                <a:spcPts val="600"/>
-              </a:spcAft>
-            </a:pPr>
-            <a:r>
-              <a:rPr sz="1500">
-                <a:solidFill>
-                  <a:srgbClr val="22282E"/>
-                </a:solidFill>
-              </a:rPr>
-              <a:t>•  Leer permisos. Crea un archivo y examínalo:</a:t>
-            </a:r>
-          </a:p>
-          <a:p>
-            <a:pPr>
-              <a:spcAft>
-                <a:spcPts val="600"/>
-              </a:spcAft>
-            </a:pPr>
-            <a:r>
-              <a:rPr sz="1500">
-                <a:solidFill>
-                  <a:srgbClr val="22282E"/>
-                </a:solidFill>
-              </a:rPr>
-              <a:t>•  touch prueba.txt ; stat prueba.txt ; ls -l prueba.txt</a:t>
-            </a:r>
-          </a:p>
-          <a:p>
-            <a:pPr>
-              <a:spcAft>
-                <a:spcPts val="600"/>
-              </a:spcAft>
-            </a:pPr>
-            <a:r>
-              <a:rPr sz="1500">
-                <a:solidFill>
-                  <a:srgbClr val="22282E"/>
-                </a:solidFill>
-              </a:rPr>
-              <a:t>•  Descompón la cadena -rw-r--r-- en propietario/grupo/otros.</a:t>
-            </a:r>
-          </a:p>
-          <a:p>
-            <a:pPr>
-              <a:spcAft>
-                <a:spcPts val="600"/>
-              </a:spcAft>
-            </a:pPr>
-            <a:r>
-              <a:rPr sz="1500">
-                <a:solidFill>
-                  <a:srgbClr val="22282E"/>
-                </a:solidFill>
-              </a:rPr>
-              <a:t>•  Cambiar permisos en simbólico y octal:</a:t>
+              <a:t>•  Término — Definición concisa</a:t>
+            </a:r>
+          </a:p>
+          <a:p>
+            <a:pPr>
+              <a:spcAft>
+                <a:spcPts val="600"/>
+              </a:spcAft>
+            </a:pPr>
+            <a:r>
+              <a:rPr sz="1500">
+                <a:solidFill>
+                  <a:srgbClr val="22282E"/>
+                </a:solidFill>
+              </a:rPr>
+              <a:t>•  FHS — Estándar que define el propósito de cada directorio en Linux</a:t>
+            </a:r>
+          </a:p>
+          <a:p>
+            <a:pPr>
+              <a:spcAft>
+                <a:spcPts val="600"/>
+              </a:spcAft>
+            </a:pPr>
+            <a:r>
+              <a:rPr sz="1500">
+                <a:solidFill>
+                  <a:srgbClr val="22282E"/>
+                </a:solidFill>
+              </a:rPr>
+              <a:t>•  root — Superusuario (UID 0) que ignora los permisos tradicionales</a:t>
+            </a:r>
+          </a:p>
+          <a:p>
+            <a:pPr>
+              <a:spcAft>
+                <a:spcPts val="600"/>
+              </a:spcAft>
+            </a:pPr>
+            <a:r>
+              <a:rPr sz="1500">
+                <a:solidFill>
+                  <a:srgbClr val="22282E"/>
+                </a:solidFill>
+              </a:rPr>
+              <a:t>•  UID / GID — Identificadores numéricos de usuario y grupo</a:t>
+            </a:r>
+          </a:p>
+          <a:p>
+            <a:pPr>
+              <a:spcAft>
+                <a:spcPts val="600"/>
+              </a:spcAft>
+            </a:pPr>
+            <a:r>
+              <a:rPr sz="1500">
+                <a:solidFill>
+                  <a:srgbClr val="22282E"/>
+                </a:solidFill>
+              </a:rPr>
+              <a:t>•  rwx — Permisos de lectura, escritura y ejecución</a:t>
+            </a:r>
+          </a:p>
+          <a:p>
+            <a:pPr>
+              <a:spcAft>
+                <a:spcPts val="600"/>
+              </a:spcAft>
+            </a:pPr>
+            <a:r>
+              <a:rPr sz="1500">
+                <a:solidFill>
+                  <a:srgbClr val="22282E"/>
+                </a:solidFill>
+              </a:rPr>
+              <a:t>•  Octal — Notación numérica de permisos (r=4, w=2, x=1)</a:t>
+            </a:r>
+          </a:p>
+          <a:p>
+            <a:pPr>
+              <a:spcAft>
+                <a:spcPts val="600"/>
+              </a:spcAft>
+            </a:pPr>
+            <a:r>
+              <a:rPr sz="1500">
+                <a:solidFill>
+                  <a:srgbClr val="22282E"/>
+                </a:solidFill>
+              </a:rPr>
+              <a:t>•  /etc/passwd — Definición de cuentas, legible por todos</a:t>
             </a:r>
           </a:p>
         </p:txBody>
@@ -4479,7 +4990,7 @@
                   <a:srgbClr val="0B3D2E"/>
                 </a:solidFill>
               </a:rPr>
-              <a:t>✍️ Ejercicios</a:t>
+              <a:t>🧰 Herramientas y preparación</a:t>
             </a:r>
           </a:p>
         </p:txBody>
@@ -4517,82 +5028,7 @@
                   <a:srgbClr val="22282E"/>
                 </a:solidFill>
               </a:rPr>
-              <a:t>•  Traduce a octal: rwxr-x---, rw-rw-r--, r--------.</a:t>
-            </a:r>
-          </a:p>
-          <a:p>
-            <a:pPr>
-              <a:spcAft>
-                <a:spcPts val="600"/>
-              </a:spcAft>
-            </a:pPr>
-            <a:r>
-              <a:rPr sz="1500">
-                <a:solidFill>
-                  <a:srgbClr val="22282E"/>
-                </a:solidFill>
-              </a:rPr>
-              <a:t>•  Explica qué significa el permiso x en un directorio frente a en un archivo.</a:t>
-            </a:r>
-          </a:p>
-          <a:p>
-            <a:pPr>
-              <a:spcAft>
-                <a:spcPts val="600"/>
-              </a:spcAft>
-            </a:pPr>
-            <a:r>
-              <a:rPr sz="1500">
-                <a:solidFill>
-                  <a:srgbClr val="22282E"/>
-                </a:solidFill>
-              </a:rPr>
-              <a:t>•  Crea un directorio compartido por un grupo donde los archivos nuevos hereden el grupo (pista: SGID).</a:t>
-            </a:r>
-          </a:p>
-          <a:p>
-            <a:pPr>
-              <a:spcAft>
-                <a:spcPts val="600"/>
-              </a:spcAft>
-            </a:pPr>
-            <a:r>
-              <a:rPr sz="1500">
-                <a:solidFill>
-                  <a:srgbClr val="22282E"/>
-                </a:solidFill>
-              </a:rPr>
-              <a:t>•  Configura un directorio "temporal" donde cada usuario solo pueda borrar sus propios archivos (sticky bit).</a:t>
-            </a:r>
-          </a:p>
-          <a:p>
-            <a:pPr>
-              <a:spcAft>
-                <a:spcPts val="600"/>
-              </a:spcAft>
-            </a:pPr>
-            <a:r>
-              <a:rPr sz="1500">
-                <a:solidFill>
-                  <a:srgbClr val="22282E"/>
-                </a:solidFill>
-              </a:rPr>
-              <a:t>•  Investiga por qué /etc/shadow tiene permisos 640 root:shadow y qué pasaría con 644.</a:t>
-            </a:r>
-          </a:p>
-          <a:p>
-            <a:pPr>
-              <a:spcAft>
-                <a:spcPts val="600"/>
-              </a:spcAft>
-            </a:pPr>
-            <a:r>
-              <a:rPr sz="1500">
-                <a:solidFill>
-                  <a:srgbClr val="22282E"/>
-                </a:solidFill>
-              </a:rPr>
-              <a:t>•  Con find, localiza archivos con escritura para "otros" en /etc y explica el riesgo.</a:t>
+              <a:t>•  Trabaja en tu VM Kali o en cualquier Linux del laboratorio construido en la Clase 004. Necesitas una terminal y una cuenta con sudo. Los comandos base son ls -l, chmod, chown, id, stat, find, umask y…</a:t>
             </a:r>
           </a:p>
         </p:txBody>
@@ -4643,7 +5079,7 @@
                   <a:srgbClr val="0B3D2E"/>
                 </a:solidFill>
               </a:rPr>
-              <a:t>📝 Reto verificable</a:t>
+              <a:t>🧪 Laboratorio guiado</a:t>
             </a:r>
           </a:p>
         </p:txBody>
@@ -4681,22 +5117,97 @@
                   <a:srgbClr val="22282E"/>
                 </a:solidFill>
               </a:rPr>
-              <a:t>•  Configura una carpeta de proyecto compartida por un grupo equipo con estas propiedades: los miembros pueden crear y editar archivos, los archivos nuevos pertenecen automáticamente al grupo, y nadie puede borrar archivos ajenos. Documenta los permisos aplicados.</a:t>
-            </a:r>
-          </a:p>
-          <a:p>
-            <a:pPr>
-              <a:spcAft>
-                <a:spcPts val="600"/>
-              </a:spcAft>
-            </a:pPr>
-            <a:r>
-              <a:rPr sz="1500">
-                <a:solidFill>
-                  <a:srgbClr val="22282E"/>
-                </a:solidFill>
-              </a:rPr>
-              <a:t>•  Criterio de aceptación: ls -ld de la carpeta muestra SGID y sticky bit activos; un segundo usuario del grupo puede crear un archivo que queda con grupo equipo, pero no puede borrar el del otro. Verificable con dos cuentas de prueba.</a:t>
+              <a:t>•  Explorar el FHS y observar los permisos de los archivos de cuentas:</a:t>
+            </a:r>
+          </a:p>
+          <a:p>
+            <a:pPr>
+              <a:spcAft>
+                <a:spcPts val="600"/>
+              </a:spcAft>
+            </a:pPr>
+            <a:r>
+              <a:rPr sz="1500">
+                <a:solidFill>
+                  <a:srgbClr val="22282E"/>
+                </a:solidFill>
+              </a:rPr>
+              <a:t>•  Confirma que shadow no es legible por usuarios normales.</a:t>
+            </a:r>
+          </a:p>
+          <a:p>
+            <a:pPr>
+              <a:spcAft>
+                <a:spcPts val="600"/>
+              </a:spcAft>
+            </a:pPr>
+            <a:r>
+              <a:rPr sz="1500">
+                <a:solidFill>
+                  <a:srgbClr val="22282E"/>
+                </a:solidFill>
+              </a:rPr>
+              <a:t>•  Leer permisos. Crea un archivo y examínalo:</a:t>
+            </a:r>
+          </a:p>
+          <a:p>
+            <a:pPr>
+              <a:spcAft>
+                <a:spcPts val="600"/>
+              </a:spcAft>
+            </a:pPr>
+            <a:r>
+              <a:rPr sz="1500">
+                <a:solidFill>
+                  <a:srgbClr val="22282E"/>
+                </a:solidFill>
+              </a:rPr>
+              <a:t>•  Descompón la cadena -rw-r--r-- en propietario, grupo y otros.</a:t>
+            </a:r>
+          </a:p>
+          <a:p>
+            <a:pPr>
+              <a:spcAft>
+                <a:spcPts val="600"/>
+              </a:spcAft>
+            </a:pPr>
+            <a:r>
+              <a:rPr sz="1500">
+                <a:solidFill>
+                  <a:srgbClr val="22282E"/>
+                </a:solidFill>
+              </a:rPr>
+              <a:t>•  Cambiar permisos en notación simbólica y octal:</a:t>
+            </a:r>
+          </a:p>
+          <a:p>
+            <a:pPr>
+              <a:spcAft>
+                <a:spcPts val="600"/>
+              </a:spcAft>
+            </a:pPr>
+            <a:r>
+              <a:rPr sz="1500">
+                <a:solidFill>
+                  <a:srgbClr val="22282E"/>
+                </a:solidFill>
+              </a:rPr>
+              <a:t>•  Usuarios y grupos. Crea un usuario de prueba y revisa su identidad:</a:t>
+            </a:r>
+          </a:p>
+          <a:p>
+            <a:pPr>
+              <a:spcAft>
+                <a:spcPts val="600"/>
+              </a:spcAft>
+            </a:pPr>
+            <a:r>
+              <a:rPr sz="1500">
+                <a:solidFill>
+                  <a:srgbClr val="22282E"/>
+                </a:solidFill>
+              </a:rPr>
+              <a:t>•  Comprobar tu umask y su efecto sobre un archivo nuevo:</a:t>
             </a:r>
           </a:p>
         </p:txBody>
